--- a/assets/pptx/catalog-465.pptx
+++ b/assets/pptx/catalog-465.pptx
@@ -3460,7 +3460,7 @@
                 <a:ea typeface="Ebrima"/>
                 <a:cs typeface="Ebrima"/>
               </a:rPr>
-              <a:t>(ኦሮምኛ) (3x)</a:t>
+              <a:t>ኦሮምኛ 3x</a:t>
             </a:r>
           </a:p>
         </p:txBody>
@@ -3563,7 +3563,7 @@
                 <a:ea typeface="Ebrima"/>
                 <a:cs typeface="Ebrima"/>
               </a:rPr>
-              <a:t>ሰበሰብከኝ አባዬ ባለዉለታዬ (2x)</a:t>
+              <a:t>ሰበሰብከኝ አባዬ ባለዉለታዬ 2x</a:t>
             </a:r>
           </a:p>
         </p:txBody>
@@ -4266,7 +4266,7 @@
                 <a:ea typeface="Ebrima"/>
                 <a:cs typeface="Ebrima"/>
               </a:rPr>
-              <a:t>(ኦሮምኛ) (3x)</a:t>
+              <a:t>ኦሮምኛ 3x</a:t>
             </a:r>
           </a:p>
         </p:txBody>
@@ -4369,7 +4369,7 @@
                 <a:ea typeface="Ebrima"/>
                 <a:cs typeface="Ebrima"/>
               </a:rPr>
-              <a:t>ሰበሰብከኝ አባዬ ባለዉለታዬ (2x)</a:t>
+              <a:t>ሰበሰብከኝ አባዬ ባለዉለታዬ 2x</a:t>
             </a:r>
           </a:p>
         </p:txBody>
